--- a/聖誕佳音歌.pptx
+++ b/聖誕佳音歌.pptx
@@ -299,7 +299,7 @@
             <a:fld id="{838F70C2-77FE-46FF-9CC9-005D31B4EEA0}" type="datetimeFigureOut">
               <a:rPr lang="en-US" smtClean="0"/>
               <a:pPr/>
-              <a:t>12/10/2023</a:t>
+              <a:t>12/17/2023</a:t>
             </a:fld>
             <a:endParaRPr lang="en-US"/>
           </a:p>
@@ -351,7 +351,7 @@
     </p:spTree>
     <p:extLst>
       <p:ext uri="{BB962C8B-B14F-4D97-AF65-F5344CB8AC3E}">
-        <p14:creationId xmlns:p14="http://schemas.microsoft.com/office/powerpoint/2010/main" xmlns="" val="831594246"/>
+        <p14:creationId xmlns="" xmlns:p14="http://schemas.microsoft.com/office/powerpoint/2010/main" val="831594246"/>
       </p:ext>
     </p:extLst>
   </p:cSld>
@@ -471,7 +471,7 @@
             <a:fld id="{838F70C2-77FE-46FF-9CC9-005D31B4EEA0}" type="datetimeFigureOut">
               <a:rPr lang="en-US" smtClean="0"/>
               <a:pPr/>
-              <a:t>12/10/2023</a:t>
+              <a:t>12/17/2023</a:t>
             </a:fld>
             <a:endParaRPr lang="en-US"/>
           </a:p>
@@ -523,7 +523,7 @@
     </p:spTree>
     <p:extLst>
       <p:ext uri="{BB962C8B-B14F-4D97-AF65-F5344CB8AC3E}">
-        <p14:creationId xmlns:p14="http://schemas.microsoft.com/office/powerpoint/2010/main" xmlns="" val="1711521684"/>
+        <p14:creationId xmlns="" xmlns:p14="http://schemas.microsoft.com/office/powerpoint/2010/main" val="1711521684"/>
       </p:ext>
     </p:extLst>
   </p:cSld>
@@ -653,7 +653,7 @@
             <a:fld id="{838F70C2-77FE-46FF-9CC9-005D31B4EEA0}" type="datetimeFigureOut">
               <a:rPr lang="en-US" smtClean="0"/>
               <a:pPr/>
-              <a:t>12/10/2023</a:t>
+              <a:t>12/17/2023</a:t>
             </a:fld>
             <a:endParaRPr lang="en-US"/>
           </a:p>
@@ -705,7 +705,7 @@
     </p:spTree>
     <p:extLst>
       <p:ext uri="{BB962C8B-B14F-4D97-AF65-F5344CB8AC3E}">
-        <p14:creationId xmlns:p14="http://schemas.microsoft.com/office/powerpoint/2010/main" xmlns="" val="3072458821"/>
+        <p14:creationId xmlns="" xmlns:p14="http://schemas.microsoft.com/office/powerpoint/2010/main" val="3072458821"/>
       </p:ext>
     </p:extLst>
   </p:cSld>
@@ -825,7 +825,7 @@
             <a:fld id="{838F70C2-77FE-46FF-9CC9-005D31B4EEA0}" type="datetimeFigureOut">
               <a:rPr lang="en-US" smtClean="0"/>
               <a:pPr/>
-              <a:t>12/10/2023</a:t>
+              <a:t>12/17/2023</a:t>
             </a:fld>
             <a:endParaRPr lang="en-US"/>
           </a:p>
@@ -877,7 +877,7 @@
     </p:spTree>
     <p:extLst>
       <p:ext uri="{BB962C8B-B14F-4D97-AF65-F5344CB8AC3E}">
-        <p14:creationId xmlns:p14="http://schemas.microsoft.com/office/powerpoint/2010/main" xmlns="" val="1763102075"/>
+        <p14:creationId xmlns="" xmlns:p14="http://schemas.microsoft.com/office/powerpoint/2010/main" val="1763102075"/>
       </p:ext>
     </p:extLst>
   </p:cSld>
@@ -1073,7 +1073,7 @@
             <a:fld id="{838F70C2-77FE-46FF-9CC9-005D31B4EEA0}" type="datetimeFigureOut">
               <a:rPr lang="en-US" smtClean="0"/>
               <a:pPr/>
-              <a:t>12/10/2023</a:t>
+              <a:t>12/17/2023</a:t>
             </a:fld>
             <a:endParaRPr lang="en-US"/>
           </a:p>
@@ -1125,7 +1125,7 @@
     </p:spTree>
     <p:extLst>
       <p:ext uri="{BB962C8B-B14F-4D97-AF65-F5344CB8AC3E}">
-        <p14:creationId xmlns:p14="http://schemas.microsoft.com/office/powerpoint/2010/main" xmlns="" val="605348147"/>
+        <p14:creationId xmlns="" xmlns:p14="http://schemas.microsoft.com/office/powerpoint/2010/main" val="605348147"/>
       </p:ext>
     </p:extLst>
   </p:cSld>
@@ -1363,7 +1363,7 @@
             <a:fld id="{838F70C2-77FE-46FF-9CC9-005D31B4EEA0}" type="datetimeFigureOut">
               <a:rPr lang="en-US" smtClean="0"/>
               <a:pPr/>
-              <a:t>12/10/2023</a:t>
+              <a:t>12/17/2023</a:t>
             </a:fld>
             <a:endParaRPr lang="en-US"/>
           </a:p>
@@ -1415,7 +1415,7 @@
     </p:spTree>
     <p:extLst>
       <p:ext uri="{BB962C8B-B14F-4D97-AF65-F5344CB8AC3E}">
-        <p14:creationId xmlns:p14="http://schemas.microsoft.com/office/powerpoint/2010/main" xmlns="" val="3960747459"/>
+        <p14:creationId xmlns="" xmlns:p14="http://schemas.microsoft.com/office/powerpoint/2010/main" val="3960747459"/>
       </p:ext>
     </p:extLst>
   </p:cSld>
@@ -1787,7 +1787,7 @@
             <a:fld id="{838F70C2-77FE-46FF-9CC9-005D31B4EEA0}" type="datetimeFigureOut">
               <a:rPr lang="en-US" smtClean="0"/>
               <a:pPr/>
-              <a:t>12/10/2023</a:t>
+              <a:t>12/17/2023</a:t>
             </a:fld>
             <a:endParaRPr lang="en-US"/>
           </a:p>
@@ -1839,7 +1839,7 @@
     </p:spTree>
     <p:extLst>
       <p:ext uri="{BB962C8B-B14F-4D97-AF65-F5344CB8AC3E}">
-        <p14:creationId xmlns:p14="http://schemas.microsoft.com/office/powerpoint/2010/main" xmlns="" val="1958819962"/>
+        <p14:creationId xmlns="" xmlns:p14="http://schemas.microsoft.com/office/powerpoint/2010/main" val="1958819962"/>
       </p:ext>
     </p:extLst>
   </p:cSld>
@@ -1907,7 +1907,7 @@
             <a:fld id="{838F70C2-77FE-46FF-9CC9-005D31B4EEA0}" type="datetimeFigureOut">
               <a:rPr lang="en-US" smtClean="0"/>
               <a:pPr/>
-              <a:t>12/10/2023</a:t>
+              <a:t>12/17/2023</a:t>
             </a:fld>
             <a:endParaRPr lang="en-US"/>
           </a:p>
@@ -1959,7 +1959,7 @@
     </p:spTree>
     <p:extLst>
       <p:ext uri="{BB962C8B-B14F-4D97-AF65-F5344CB8AC3E}">
-        <p14:creationId xmlns:p14="http://schemas.microsoft.com/office/powerpoint/2010/main" xmlns="" val="1137749765"/>
+        <p14:creationId xmlns="" xmlns:p14="http://schemas.microsoft.com/office/powerpoint/2010/main" val="1137749765"/>
       </p:ext>
     </p:extLst>
   </p:cSld>
@@ -2004,7 +2004,7 @@
             <a:fld id="{838F70C2-77FE-46FF-9CC9-005D31B4EEA0}" type="datetimeFigureOut">
               <a:rPr lang="en-US" smtClean="0"/>
               <a:pPr/>
-              <a:t>12/10/2023</a:t>
+              <a:t>12/17/2023</a:t>
             </a:fld>
             <a:endParaRPr lang="en-US"/>
           </a:p>
@@ -2056,7 +2056,7 @@
     </p:spTree>
     <p:extLst>
       <p:ext uri="{BB962C8B-B14F-4D97-AF65-F5344CB8AC3E}">
-        <p14:creationId xmlns:p14="http://schemas.microsoft.com/office/powerpoint/2010/main" xmlns="" val="2205341483"/>
+        <p14:creationId xmlns="" xmlns:p14="http://schemas.microsoft.com/office/powerpoint/2010/main" val="2205341483"/>
       </p:ext>
     </p:extLst>
   </p:cSld>
@@ -2283,7 +2283,7 @@
             <a:fld id="{838F70C2-77FE-46FF-9CC9-005D31B4EEA0}" type="datetimeFigureOut">
               <a:rPr lang="en-US" smtClean="0"/>
               <a:pPr/>
-              <a:t>12/10/2023</a:t>
+              <a:t>12/17/2023</a:t>
             </a:fld>
             <a:endParaRPr lang="en-US"/>
           </a:p>
@@ -2335,7 +2335,7 @@
     </p:spTree>
     <p:extLst>
       <p:ext uri="{BB962C8B-B14F-4D97-AF65-F5344CB8AC3E}">
-        <p14:creationId xmlns:p14="http://schemas.microsoft.com/office/powerpoint/2010/main" xmlns="" val="960737305"/>
+        <p14:creationId xmlns="" xmlns:p14="http://schemas.microsoft.com/office/powerpoint/2010/main" val="960737305"/>
       </p:ext>
     </p:extLst>
   </p:cSld>
@@ -2542,7 +2542,7 @@
             <a:fld id="{838F70C2-77FE-46FF-9CC9-005D31B4EEA0}" type="datetimeFigureOut">
               <a:rPr lang="en-US" smtClean="0"/>
               <a:pPr/>
-              <a:t>12/10/2023</a:t>
+              <a:t>12/17/2023</a:t>
             </a:fld>
             <a:endParaRPr lang="en-US"/>
           </a:p>
@@ -2594,7 +2594,7 @@
     </p:spTree>
     <p:extLst>
       <p:ext uri="{BB962C8B-B14F-4D97-AF65-F5344CB8AC3E}">
-        <p14:creationId xmlns:p14="http://schemas.microsoft.com/office/powerpoint/2010/main" xmlns="" val="3220604928"/>
+        <p14:creationId xmlns="" xmlns:p14="http://schemas.microsoft.com/office/powerpoint/2010/main" val="3220604928"/>
       </p:ext>
     </p:extLst>
   </p:cSld>
@@ -2760,7 +2760,7 @@
             <a:fld id="{838F70C2-77FE-46FF-9CC9-005D31B4EEA0}" type="datetimeFigureOut">
               <a:rPr lang="en-US" smtClean="0"/>
               <a:pPr/>
-              <a:t>12/10/2023</a:t>
+              <a:t>12/17/2023</a:t>
             </a:fld>
             <a:endParaRPr lang="en-US"/>
           </a:p>
@@ -2848,7 +2848,7 @@
     </p:spTree>
     <p:extLst>
       <p:ext uri="{BB962C8B-B14F-4D97-AF65-F5344CB8AC3E}">
-        <p14:creationId xmlns:p14="http://schemas.microsoft.com/office/powerpoint/2010/main" xmlns="" val="3714954995"/>
+        <p14:creationId xmlns="" xmlns:p14="http://schemas.microsoft.com/office/powerpoint/2010/main" val="3714954995"/>
       </p:ext>
     </p:extLst>
   </p:cSld>
@@ -3197,6 +3197,13 @@
   <p:clrMapOvr>
     <a:masterClrMapping/>
   </p:clrMapOvr>
+  <p:timing>
+    <p:tnLst>
+      <p:par>
+        <p:cTn id="1" dur="indefinite" restart="never" nodeType="tmRoot"/>
+      </p:par>
+    </p:tnLst>
+  </p:timing>
 </p:sld>
 </file>
 
@@ -3359,13 +3366,20 @@
     </p:spTree>
     <p:extLst>
       <p:ext uri="{BB962C8B-B14F-4D97-AF65-F5344CB8AC3E}">
-        <p14:creationId xmlns:p14="http://schemas.microsoft.com/office/powerpoint/2010/main" xmlns="" val="1934889982"/>
+        <p14:creationId xmlns="" xmlns:p14="http://schemas.microsoft.com/office/powerpoint/2010/main" val="1934889982"/>
       </p:ext>
     </p:extLst>
   </p:cSld>
   <p:clrMapOvr>
     <a:masterClrMapping/>
   </p:clrMapOvr>
+  <p:timing>
+    <p:tnLst>
+      <p:par>
+        <p:cTn id="1" dur="indefinite" restart="never" nodeType="tmRoot"/>
+      </p:par>
+    </p:tnLst>
+  </p:timing>
 </p:sld>
 </file>
 
@@ -3518,13 +3532,20 @@
     </p:spTree>
     <p:extLst>
       <p:ext uri="{BB962C8B-B14F-4D97-AF65-F5344CB8AC3E}">
-        <p14:creationId xmlns:p14="http://schemas.microsoft.com/office/powerpoint/2010/main" xmlns="" val="2483508515"/>
+        <p14:creationId xmlns="" xmlns:p14="http://schemas.microsoft.com/office/powerpoint/2010/main" val="2483508515"/>
       </p:ext>
     </p:extLst>
   </p:cSld>
   <p:clrMapOvr>
     <a:masterClrMapping/>
   </p:clrMapOvr>
+  <p:timing>
+    <p:tnLst>
+      <p:par>
+        <p:cTn id="1" dur="indefinite" restart="never" nodeType="tmRoot"/>
+      </p:par>
+    </p:tnLst>
+  </p:timing>
 </p:sld>
 </file>
 
@@ -3593,14 +3614,34 @@
               <a:buNone/>
             </a:pPr>
             <a:r>
-              <a:rPr lang="zh-TW" altLang="en-US" sz="6400" b="1" dirty="0">
+              <a:rPr lang="zh-CN" altLang="en-US" sz="6400" b="1" dirty="0" smtClean="0">
                 <a:solidFill>
                   <a:srgbClr val="660033"/>
                 </a:solidFill>
                 <a:latin typeface="微軟正黑體" pitchFamily="34" charset="-120"/>
                 <a:ea typeface="微軟正黑體" pitchFamily="34" charset="-120"/>
               </a:rPr>
-              <a:t>牧人正當  看守羊羣</a:t>
+              <a:t>先向田間</a:t>
+            </a:r>
+            <a:r>
+              <a:rPr lang="zh-TW" altLang="en-US" sz="6400" b="1" dirty="0" smtClean="0">
+                <a:solidFill>
+                  <a:srgbClr val="660033"/>
+                </a:solidFill>
+                <a:latin typeface="微軟正黑體" pitchFamily="34" charset="-120"/>
+                <a:ea typeface="微軟正黑體" pitchFamily="34" charset="-120"/>
+              </a:rPr>
+              <a:t>  </a:t>
+            </a:r>
+            <a:r>
+              <a:rPr lang="zh-CN" altLang="en-US" sz="6400" b="1" dirty="0" smtClean="0">
+                <a:solidFill>
+                  <a:srgbClr val="660033"/>
+                </a:solidFill>
+                <a:latin typeface="微軟正黑體" pitchFamily="34" charset="-120"/>
+                <a:ea typeface="微軟正黑體" pitchFamily="34" charset="-120"/>
+              </a:rPr>
+              <a:t>貧苦牧人</a:t>
             </a:r>
             <a:endParaRPr lang="en-US" altLang="zh-TW" sz="6400" b="1" dirty="0">
               <a:solidFill>
@@ -3689,6 +3730,13 @@
   <p:clrMapOvr>
     <a:masterClrMapping/>
   </p:clrMapOvr>
+  <p:timing>
+    <p:tnLst>
+      <p:par>
+        <p:cTn id="1" dur="indefinite" restart="never" nodeType="tmRoot"/>
+      </p:par>
+    </p:tnLst>
+  </p:timing>
 </p:sld>
 </file>
 
@@ -3735,14 +3783,24 @@
               <a:buNone/>
             </a:pPr>
             <a:r>
-              <a:rPr lang="zh-CN" altLang="en-US" sz="6400" b="1" dirty="0">
+              <a:rPr lang="zh-CN" altLang="en-US" sz="6400" b="1" dirty="0" smtClean="0">
                 <a:solidFill>
                   <a:srgbClr val="660033"/>
                 </a:solidFill>
                 <a:latin typeface="微軟正黑體" pitchFamily="34" charset="-120"/>
                 <a:ea typeface="微軟正黑體" pitchFamily="34" charset="-120"/>
               </a:rPr>
-              <a:t>牧人正當  看守羊羣</a:t>
+              <a:t>牧人正當  看守羊</a:t>
+            </a:r>
+            <a:r>
+              <a:rPr lang="zh-CN" altLang="en-US" sz="6400" b="1" dirty="0">
+                <a:solidFill>
+                  <a:srgbClr val="660033"/>
+                </a:solidFill>
+                <a:latin typeface="微軟正黑體" pitchFamily="34" charset="-120"/>
+                <a:ea typeface="微軟正黑體" pitchFamily="34" charset="-120"/>
+              </a:rPr>
+              <a:t>羣</a:t>
             </a:r>
             <a:endParaRPr lang="en-US" altLang="zh-CN" sz="6400" b="1" dirty="0">
               <a:solidFill>
@@ -3851,13 +3909,20 @@
     </p:spTree>
     <p:extLst>
       <p:ext uri="{BB962C8B-B14F-4D97-AF65-F5344CB8AC3E}">
-        <p14:creationId xmlns:p14="http://schemas.microsoft.com/office/powerpoint/2010/main" xmlns="" val="3107686634"/>
+        <p14:creationId xmlns="" xmlns:p14="http://schemas.microsoft.com/office/powerpoint/2010/main" val="3107686634"/>
       </p:ext>
     </p:extLst>
   </p:cSld>
   <p:clrMapOvr>
     <a:masterClrMapping/>
   </p:clrMapOvr>
+  <p:timing>
+    <p:tnLst>
+      <p:par>
+        <p:cTn id="1" dur="indefinite" restart="never" nodeType="tmRoot"/>
+      </p:par>
+    </p:tnLst>
+  </p:timing>
 </p:sld>
 </file>
 
@@ -4020,13 +4085,20 @@
     </p:spTree>
     <p:extLst>
       <p:ext uri="{BB962C8B-B14F-4D97-AF65-F5344CB8AC3E}">
-        <p14:creationId xmlns:p14="http://schemas.microsoft.com/office/powerpoint/2010/main" xmlns="" val="1263309101"/>
+        <p14:creationId xmlns="" xmlns:p14="http://schemas.microsoft.com/office/powerpoint/2010/main" val="1263309101"/>
       </p:ext>
     </p:extLst>
   </p:cSld>
   <p:clrMapOvr>
     <a:masterClrMapping/>
   </p:clrMapOvr>
+  <p:timing>
+    <p:tnLst>
+      <p:par>
+        <p:cTn id="1" dur="indefinite" restart="never" nodeType="tmRoot"/>
+      </p:par>
+    </p:tnLst>
+  </p:timing>
 </p:sld>
 </file>
 
@@ -4199,13 +4271,20 @@
     </p:spTree>
     <p:extLst>
       <p:ext uri="{BB962C8B-B14F-4D97-AF65-F5344CB8AC3E}">
-        <p14:creationId xmlns:p14="http://schemas.microsoft.com/office/powerpoint/2010/main" xmlns="" val="4232961271"/>
+        <p14:creationId xmlns="" xmlns:p14="http://schemas.microsoft.com/office/powerpoint/2010/main" val="4232961271"/>
       </p:ext>
     </p:extLst>
   </p:cSld>
   <p:clrMapOvr>
     <a:masterClrMapping/>
   </p:clrMapOvr>
+  <p:timing>
+    <p:tnLst>
+      <p:par>
+        <p:cTn id="1" dur="indefinite" restart="never" nodeType="tmRoot"/>
+      </p:par>
+    </p:tnLst>
+  </p:timing>
 </p:sld>
 </file>
 
@@ -4358,13 +4437,20 @@
     </p:spTree>
     <p:extLst>
       <p:ext uri="{BB962C8B-B14F-4D97-AF65-F5344CB8AC3E}">
-        <p14:creationId xmlns:p14="http://schemas.microsoft.com/office/powerpoint/2010/main" xmlns="" val="26684843"/>
+        <p14:creationId xmlns="" xmlns:p14="http://schemas.microsoft.com/office/powerpoint/2010/main" val="26684843"/>
       </p:ext>
     </p:extLst>
   </p:cSld>
   <p:clrMapOvr>
     <a:masterClrMapping/>
   </p:clrMapOvr>
+  <p:timing>
+    <p:tnLst>
+      <p:par>
+        <p:cTn id="1" dur="indefinite" restart="never" nodeType="tmRoot"/>
+      </p:par>
+    </p:tnLst>
+  </p:timing>
 </p:sld>
 </file>
 
@@ -4527,13 +4613,20 @@
     </p:spTree>
     <p:extLst>
       <p:ext uri="{BB962C8B-B14F-4D97-AF65-F5344CB8AC3E}">
-        <p14:creationId xmlns:p14="http://schemas.microsoft.com/office/powerpoint/2010/main" xmlns="" val="3239007950"/>
+        <p14:creationId xmlns="" xmlns:p14="http://schemas.microsoft.com/office/powerpoint/2010/main" val="3239007950"/>
       </p:ext>
     </p:extLst>
   </p:cSld>
   <p:clrMapOvr>
     <a:masterClrMapping/>
   </p:clrMapOvr>
+  <p:timing>
+    <p:tnLst>
+      <p:par>
+        <p:cTn id="1" dur="indefinite" restart="never" nodeType="tmRoot"/>
+      </p:par>
+    </p:tnLst>
+  </p:timing>
 </p:sld>
 </file>
 
@@ -4696,13 +4789,20 @@
     </p:spTree>
     <p:extLst>
       <p:ext uri="{BB962C8B-B14F-4D97-AF65-F5344CB8AC3E}">
-        <p14:creationId xmlns:p14="http://schemas.microsoft.com/office/powerpoint/2010/main" xmlns="" val="1085285675"/>
+        <p14:creationId xmlns="" xmlns:p14="http://schemas.microsoft.com/office/powerpoint/2010/main" val="1085285675"/>
       </p:ext>
     </p:extLst>
   </p:cSld>
   <p:clrMapOvr>
     <a:masterClrMapping/>
   </p:clrMapOvr>
+  <p:timing>
+    <p:tnLst>
+      <p:par>
+        <p:cTn id="1" dur="indefinite" restart="never" nodeType="tmRoot"/>
+      </p:par>
+    </p:tnLst>
+  </p:timing>
 </p:sld>
 </file>
 
@@ -4875,13 +4975,20 @@
     </p:spTree>
     <p:extLst>
       <p:ext uri="{BB962C8B-B14F-4D97-AF65-F5344CB8AC3E}">
-        <p14:creationId xmlns:p14="http://schemas.microsoft.com/office/powerpoint/2010/main" xmlns="" val="1252980300"/>
+        <p14:creationId xmlns="" xmlns:p14="http://schemas.microsoft.com/office/powerpoint/2010/main" val="1252980300"/>
       </p:ext>
     </p:extLst>
   </p:cSld>
   <p:clrMapOvr>
     <a:masterClrMapping/>
   </p:clrMapOvr>
+  <p:timing>
+    <p:tnLst>
+      <p:par>
+        <p:cTn id="1" dur="indefinite" restart="never" nodeType="tmRoot"/>
+      </p:par>
+    </p:tnLst>
+  </p:timing>
 </p:sld>
 </file>
 
@@ -5167,7 +5274,7 @@
   <a:extraClrSchemeLst/>
   <a:extLst>
     <a:ext uri="{05A4C25C-085E-4340-85A3-A5531E510DB2}">
-      <thm15:themeFamily xmlns:thm15="http://schemas.microsoft.com/office/thememl/2012/main" xmlns="" name="Theme1" id="{75BBF97F-0525-4D7F-ABA1-4CCFA07F43A2}" vid="{8D3552C7-B8E4-422B-9896-C8F00D815D11}"/>
+      <thm15:themeFamily xmlns="" xmlns:thm15="http://schemas.microsoft.com/office/thememl/2012/main" name="Theme1" id="{75BBF97F-0525-4D7F-ABA1-4CCFA07F43A2}" vid="{8D3552C7-B8E4-422B-9896-C8F00D815D11}"/>
     </a:ext>
   </a:extLst>
 </a:theme>
